--- a/assessments/HS-LS1-1/slides/Day_4_What_can_one_letter_do.pptx
+++ b/assessments/HS-LS1-1/slides/Day_4_What_can_one_letter_do.pptx
@@ -3205,7 +3205,7 @@
               </a:defRPr>
             </a:pPr>
             <a:r>
-              <a:t>• Today's target: changing one DNA base can change a protein and what it does (LS1-1.4)</a:t>
+              <a:t>• Today's target: changing one DNA base can change a protein and what it does (LS1-1.3)</a:t>
             </a:r>
           </a:p>
         </p:txBody>
@@ -4785,7 +4785,7 @@
               </a:defRPr>
             </a:pPr>
             <a:r>
-              <a:t>Exit ticket: CFA LS1-1.4</a:t>
+              <a:t>Exit ticket: CFA LS1-1.3</a:t>
             </a:r>
           </a:p>
         </p:txBody>
